--- a/Files/Regional-Economic-Development-Deck.pptx
+++ b/Files/Regional-Economic-Development-Deck.pptx
@@ -76,7 +76,16 @@
                 </a:solidFill>
                 <a:latin typeface="Calibri"/>
               </a:rPr>
-              <a:t>Click to move the slide</a:t>
+              <a:t>Click to move the </a:t>
+            </a:r>
+            <a:r>
+              <a:rPr b="0" lang="en-US" sz="1800" spc="-1" strike="noStrike">
+                <a:solidFill>
+                  <a:srgbClr val="000000"/>
+                </a:solidFill>
+                <a:latin typeface="Calibri"/>
+              </a:rPr>
+              <a:t>slide</a:t>
             </a:r>
             <a:endParaRPr b="0" lang="en-US" sz="1800" spc="-1" strike="noStrike">
               <a:solidFill>
@@ -119,7 +128,13 @@
               <a:rPr b="0" lang="en-US" sz="2000" spc="-1" strike="noStrike">
                 <a:latin typeface="Arial"/>
               </a:rPr>
-              <a:t>Click to edit the notes format</a:t>
+              <a:t>Click to edit the </a:t>
+            </a:r>
+            <a:r>
+              <a:rPr b="0" lang="en-US" sz="2000" spc="-1" strike="noStrike">
+                <a:latin typeface="Arial"/>
+              </a:rPr>
+              <a:t>notes format</a:t>
             </a:r>
             <a:endParaRPr b="0" lang="en-US" sz="2000" spc="-1" strike="noStrike">
               <a:latin typeface="Arial"/>
@@ -304,7 +319,7 @@
             <a:pPr algn="r">
               <a:buNone/>
             </a:pPr>
-            <a:fld id="{E6E06927-81A4-4553-8E45-CA68919B495D}" type="slidenum">
+            <a:fld id="{BE43819D-8468-4447-8AA5-A384BB514A74}" type="slidenum">
               <a:rPr b="0" lang="en-US" sz="1400" spc="-1" strike="noStrike">
                 <a:latin typeface="Times New Roman"/>
               </a:rPr>
@@ -445,7 +460,7 @@
               </a:lnSpc>
               <a:buNone/>
             </a:pPr>
-            <a:fld id="{FC868238-6957-4689-B771-BC8E8079E1BD}" type="slidenum">
+            <a:fld id="{E9B8431E-6567-466D-8672-9F7D35B38C83}" type="slidenum">
               <a:rPr b="0" lang="en-US" sz="1200" spc="-1" strike="noStrike">
                 <a:solidFill>
                   <a:srgbClr val="000000"/>
@@ -589,7 +604,7 @@
               </a:lnSpc>
               <a:buNone/>
             </a:pPr>
-            <a:fld id="{7FC99877-E32F-492E-88CF-E5B3C529176E}" type="slidenum">
+            <a:fld id="{C3F88BFB-2D05-4DD6-8A77-433638D13894}" type="slidenum">
               <a:rPr b="0" lang="en-US" sz="1200" spc="-1" strike="noStrike">
                 <a:solidFill>
                   <a:srgbClr val="000000"/>
@@ -733,7 +748,7 @@
               </a:lnSpc>
               <a:buNone/>
             </a:pPr>
-            <a:fld id="{7C4A2524-82DA-4FE5-A119-F6FD50EA3214}" type="slidenum">
+            <a:fld id="{FE9EE9B9-4225-4070-A4AB-407C4E6A46EB}" type="slidenum">
               <a:rPr b="0" lang="en-US" sz="1200" spc="-1" strike="noStrike">
                 <a:solidFill>
                   <a:srgbClr val="000000"/>
@@ -877,7 +892,7 @@
               </a:lnSpc>
               <a:buNone/>
             </a:pPr>
-            <a:fld id="{143B32D9-505F-4009-886C-93F6F98786C1}" type="slidenum">
+            <a:fld id="{F4C55449-EEBB-4AE5-9C8A-B1CB1B3CA7E4}" type="slidenum">
               <a:rPr b="0" lang="en-US" sz="1200" spc="-1" strike="noStrike">
                 <a:solidFill>
                   <a:srgbClr val="000000"/>
@@ -1021,7 +1036,7 @@
               </a:lnSpc>
               <a:buNone/>
             </a:pPr>
-            <a:fld id="{FB371332-903D-46F8-A1E0-510FD32ECD92}" type="slidenum">
+            <a:fld id="{B392C195-BB3E-4C9C-A279-C2B0627E0B13}" type="slidenum">
               <a:rPr b="0" lang="en-US" sz="1200" spc="-1" strike="noStrike">
                 <a:solidFill>
                   <a:srgbClr val="000000"/>
@@ -1165,7 +1180,7 @@
               </a:lnSpc>
               <a:buNone/>
             </a:pPr>
-            <a:fld id="{D93B3729-3A54-4AEA-8A92-F7B908829693}" type="slidenum">
+            <a:fld id="{B54C5CBB-8093-455D-8767-9D1284E540B3}" type="slidenum">
               <a:rPr b="0" lang="en-US" sz="1200" spc="-1" strike="noStrike">
                 <a:solidFill>
                   <a:srgbClr val="000000"/>
@@ -1309,7 +1324,7 @@
               </a:lnSpc>
               <a:buNone/>
             </a:pPr>
-            <a:fld id="{1D4F907F-3643-494C-8F04-B4146F927A74}" type="slidenum">
+            <a:fld id="{1D48DE54-BCA3-484E-9F57-39249899DCDB}" type="slidenum">
               <a:rPr b="0" lang="en-US" sz="1200" spc="-1" strike="noStrike">
                 <a:solidFill>
                   <a:srgbClr val="000000"/>
@@ -1453,7 +1468,7 @@
               </a:lnSpc>
               <a:buNone/>
             </a:pPr>
-            <a:fld id="{E7716A40-9829-4258-A565-05F2DF26DEAB}" type="slidenum">
+            <a:fld id="{57BEF9EA-2865-4880-B40B-0488960FD459}" type="slidenum">
               <a:rPr b="0" lang="en-US" sz="1200" spc="-1" strike="noStrike">
                 <a:solidFill>
                   <a:srgbClr val="000000"/>
@@ -1597,7 +1612,7 @@
               </a:lnSpc>
               <a:buNone/>
             </a:pPr>
-            <a:fld id="{71FB5351-6D9E-4E3B-A78F-097B52DD77FD}" type="slidenum">
+            <a:fld id="{1BB5CEE6-4F94-4B45-B970-693D8CEF7573}" type="slidenum">
               <a:rPr b="0" lang="en-US" sz="1200" spc="-1" strike="noStrike">
                 <a:solidFill>
                   <a:srgbClr val="000000"/>
@@ -1741,7 +1756,7 @@
               </a:lnSpc>
               <a:buNone/>
             </a:pPr>
-            <a:fld id="{D3112C15-5BDB-44C2-8A62-C39D2A853B6E}" type="slidenum">
+            <a:fld id="{80575E8E-F488-4D67-A87B-3E071F55DAF2}" type="slidenum">
               <a:rPr b="0" lang="en-US" sz="1200" spc="-1" strike="noStrike">
                 <a:solidFill>
                   <a:srgbClr val="000000"/>
@@ -3417,7 +3432,7 @@
                 </a:solidFill>
                 <a:latin typeface="Calibri"/>
               </a:rPr>
-              <a:t>Click to edit the title text </a:t>
+              <a:t>Click to edit the title </a:t>
             </a:r>
             <a:r>
               <a:rPr b="0" lang="en-US" sz="1800" spc="-1" strike="noStrike">
@@ -3426,7 +3441,7 @@
                 </a:solidFill>
                 <a:latin typeface="Calibri"/>
               </a:rPr>
-              <a:t>format</a:t>
+              <a:t>text format</a:t>
             </a:r>
             <a:endParaRPr b="0" lang="en-US" sz="1800" spc="-1" strike="noStrike">
               <a:solidFill>
